--- a/docs/decks/split_plus/split_plus.pptx
+++ b/docs/decks/split_plus/split_plus.pptx
@@ -6053,6 +6053,126 @@
                 <a:ea typeface="Calibri" pitchFamily="34" charset="-122"/>
                 <a:cs typeface="Calibri" pitchFamily="34" charset="-120"/>
               </a:rPr>
+              <a:t>Outputs keep their input's orientation</a:t>
+            </a:r>
+            <a:endParaRPr lang="en-US" sz="1100" dirty="0"/>
+          </a:p>
+          <a:p>
+            <a:pPr indent="0" marL="0">
+              <a:buNone/>
+            </a:pPr>
+            <a:r>
+              <a:rPr lang="en-US" sz="1100" dirty="0">
+                <a:solidFill>
+                  <a:srgbClr val="52514E"/>
+                </a:solidFill>
+                <a:latin typeface="Calibri" pitchFamily="34" charset="0"/>
+                <a:ea typeface="Calibri" pitchFamily="34" charset="-122"/>
+                <a:cs typeface="Calibri" pitchFamily="34" charset="-120"/>
+              </a:rPr>
+              <a:t>The reference picks the side to keep, not the normal: pieces face the way the input faced (the topsheet example faces down). Built-ins downstream (Thicken, Offset surface, Move face) follow that normal -- put Orient to reference before them, or use Thicken+ / Offset+.</a:t>
+            </a:r>
+            <a:endParaRPr lang="en-US" sz="1100" dirty="0"/>
+          </a:p>
+        </p:txBody>
+      </p:sp>
+      <p:sp>
+        <p:nvSpPr>
+          <p:cNvPr id="19" name="Shape 16"/>
+          <p:cNvSpPr/>
+          <p:nvPr/>
+        </p:nvSpPr>
+        <p:spPr>
+          <a:xfrm>
+            <a:off x="4709160" y="2011680"/>
+            <a:ext cx="274320" cy="274320"/>
+          </a:xfrm>
+          <a:prstGeom prst="ellipse">
+            <a:avLst/>
+          </a:prstGeom>
+          <a:solidFill>
+            <a:srgbClr val="C9820A"/>
+          </a:solidFill>
+          <a:ln w="12700">
+            <a:solidFill>
+              <a:srgbClr val="C9820A"/>
+            </a:solidFill>
+            <a:prstDash val="solid"/>
+          </a:ln>
+        </p:spPr>
+      </p:sp>
+      <p:sp>
+        <p:nvSpPr>
+          <p:cNvPr id="20" name="Text 17"/>
+          <p:cNvSpPr txBox="1"/>
+          <p:nvPr/>
+        </p:nvSpPr>
+        <p:spPr>
+          <a:xfrm>
+            <a:off x="4709160" y="2011680"/>
+            <a:ext cx="274320" cy="274320"/>
+          </a:xfrm>
+          <a:prstGeom prst="rect">
+            <a:avLst/>
+          </a:prstGeom>
+          <a:noFill/>
+          <a:ln/>
+        </p:spPr>
+        <p:txBody>
+          <a:bodyPr wrap="square" lIns="0" tIns="0" rIns="0" bIns="0" rtlCol="0" anchor="ctr"/>
+          <a:lstStyle/>
+          <a:p>
+            <a:pPr algn="ctr" indent="0" marL="0">
+              <a:buNone/>
+            </a:pPr>
+            <a:r>
+              <a:rPr lang="en-US" sz="1200" b="1" dirty="0">
+                <a:solidFill>
+                  <a:srgbClr val="FFFFFF"/>
+                </a:solidFill>
+                <a:latin typeface="Calibri" pitchFamily="34" charset="0"/>
+                <a:ea typeface="Calibri" pitchFamily="34" charset="-122"/>
+                <a:cs typeface="Calibri" pitchFamily="34" charset="-120"/>
+              </a:rPr>
+              <a:t>!</a:t>
+            </a:r>
+            <a:endParaRPr lang="en-US" sz="1200" dirty="0"/>
+          </a:p>
+        </p:txBody>
+      </p:sp>
+      <p:sp>
+        <p:nvSpPr>
+          <p:cNvPr id="21" name="Text 18"/>
+          <p:cNvSpPr txBox="1"/>
+          <p:nvPr/>
+        </p:nvSpPr>
+        <p:spPr>
+          <a:xfrm>
+            <a:off x="5093208" y="1965960"/>
+            <a:ext cx="3593592" cy="978408"/>
+          </a:xfrm>
+          <a:prstGeom prst="rect">
+            <a:avLst/>
+          </a:prstGeom>
+          <a:noFill/>
+          <a:ln/>
+        </p:spPr>
+        <p:txBody>
+          <a:bodyPr wrap="square" lIns="0" tIns="0" rIns="0" bIns="0" rtlCol="0" anchor="t"/>
+          <a:lstStyle/>
+          <a:p>
+            <a:pPr indent="0" marL="0">
+              <a:buNone/>
+            </a:pPr>
+            <a:r>
+              <a:rPr lang="en-US" sz="1100" b="1" dirty="0">
+                <a:solidFill>
+                  <a:srgbClr val="1F2329"/>
+                </a:solidFill>
+                <a:latin typeface="Calibri" pitchFamily="34" charset="0"/>
+                <a:ea typeface="Calibri" pitchFamily="34" charset="-122"/>
+                <a:cs typeface="Calibri" pitchFamily="34" charset="-120"/>
+              </a:rPr>
               <a:t>Edge tools are not offered</a:t>
             </a:r>
             <a:endParaRPr lang="en-US" sz="1100" dirty="0"/>
@@ -6078,13 +6198,13 @@
       </p:sp>
       <p:sp>
         <p:nvSpPr>
-          <p:cNvPr id="19" name="Shape 16"/>
+          <p:cNvPr id="22" name="Shape 19"/>
           <p:cNvSpPr/>
           <p:nvPr/>
         </p:nvSpPr>
         <p:spPr>
           <a:xfrm>
-            <a:off x="4709160" y="2011680"/>
+            <a:off x="4709160" y="3063240"/>
             <a:ext cx="274320" cy="274320"/>
           </a:xfrm>
           <a:prstGeom prst="ellipse">
@@ -6103,13 +6223,13 @@
       </p:sp>
       <p:sp>
         <p:nvSpPr>
-          <p:cNvPr id="20" name="Text 17"/>
+          <p:cNvPr id="23" name="Text 20"/>
           <p:cNvSpPr txBox="1"/>
           <p:nvPr/>
         </p:nvSpPr>
         <p:spPr>
           <a:xfrm>
-            <a:off x="4709160" y="2011680"/>
+            <a:off x="4709160" y="3063240"/>
             <a:ext cx="274320" cy="274320"/>
           </a:xfrm>
           <a:prstGeom prst="rect">
@@ -6142,13 +6262,13 @@
       </p:sp>
       <p:sp>
         <p:nvSpPr>
-          <p:cNvPr id="21" name="Text 18"/>
+          <p:cNvPr id="24" name="Text 21"/>
           <p:cNvSpPr txBox="1"/>
           <p:nvPr/>
         </p:nvSpPr>
         <p:spPr>
           <a:xfrm>
-            <a:off x="5093208" y="1965960"/>
+            <a:off x="5093208" y="3017520"/>
             <a:ext cx="3593592" cy="978408"/>
           </a:xfrm>
           <a:prstGeom prst="rect">
